--- a/docs/example8_walkthrough.pptx
+++ b/docs/example8_walkthrough.pptx
@@ -3526,7 +3526,7 @@
             <a:r>
               <a:rPr sz="1600">
                 <a:solidFill>
-                  <a:srgbClr val="EEFFFF"/>
+                  <a:srgbClr val="BAC2DE"/>
                 </a:solidFill>
                 <a:latin typeface="Consolas"/>
               </a:rPr>
@@ -3611,7 +3611,7 @@
             <a:r>
               <a:rPr sz="1600">
                 <a:solidFill>
-                  <a:srgbClr val="EEFFFF"/>
+                  <a:srgbClr val="BAC2DE"/>
                 </a:solidFill>
                 <a:latin typeface="Consolas"/>
               </a:rPr>
@@ -3785,7 +3785,7 @@
             <a:r>
               <a:rPr sz="1600">
                 <a:solidFill>
-                  <a:srgbClr val="EEFFFF"/>
+                  <a:srgbClr val="BAC2DE"/>
                 </a:solidFill>
                 <a:latin typeface="Consolas"/>
               </a:rPr>
@@ -3960,7 +3960,7 @@
             <a:r>
               <a:rPr sz="1600">
                 <a:solidFill>
-                  <a:srgbClr val="EEFFFF"/>
+                  <a:srgbClr val="BAC2DE"/>
                 </a:solidFill>
                 <a:latin typeface="Consolas"/>
               </a:rPr>
@@ -4072,7 +4072,7 @@
             <a:r>
               <a:rPr sz="1600">
                 <a:solidFill>
-                  <a:srgbClr val="EEFFFF"/>
+                  <a:srgbClr val="BAC2DE"/>
                 </a:solidFill>
                 <a:latin typeface="Consolas"/>
               </a:rPr>
@@ -4327,7 +4327,7 @@
             <a:r>
               <a:rPr sz="1600">
                 <a:solidFill>
-                  <a:srgbClr val="EEFFFF"/>
+                  <a:srgbClr val="BAC2DE"/>
                 </a:solidFill>
                 <a:latin typeface="Consolas"/>
               </a:rPr>
@@ -4381,7 +4381,7 @@
             <a:r>
               <a:rPr sz="1600">
                 <a:solidFill>
-                  <a:srgbClr val="EEFFFF"/>
+                  <a:srgbClr val="BAC2DE"/>
                 </a:solidFill>
                 <a:latin typeface="Consolas"/>
               </a:rPr>
@@ -4868,7 +4868,7 @@
             <a:r>
               <a:rPr sz="1600">
                 <a:solidFill>
-                  <a:srgbClr val="EEFFFF"/>
+                  <a:srgbClr val="BAC2DE"/>
                 </a:solidFill>
                 <a:latin typeface="Consolas"/>
               </a:rPr>
@@ -5765,7 +5765,7 @@
             <a:r>
               <a:rPr sz="1600">
                 <a:solidFill>
-                  <a:srgbClr val="EEFFFF"/>
+                  <a:srgbClr val="BAC2DE"/>
                 </a:solidFill>
                 <a:latin typeface="Consolas"/>
               </a:rPr>
@@ -5774,7 +5774,7 @@
             <a:r>
               <a:rPr sz="1600">
                 <a:solidFill>
-                  <a:srgbClr val="EEFFFF"/>
+                  <a:srgbClr val="BAC2DE"/>
                 </a:solidFill>
                 <a:latin typeface="Consolas"/>
               </a:rPr>
@@ -5810,7 +5810,7 @@
             <a:r>
               <a:rPr sz="1600">
                 <a:solidFill>
-                  <a:srgbClr val="EEFFFF"/>
+                  <a:srgbClr val="BAC2DE"/>
                 </a:solidFill>
                 <a:latin typeface="Consolas"/>
               </a:rPr>
@@ -6083,7 +6083,7 @@
             <a:r>
               <a:rPr sz="1600">
                 <a:solidFill>
-                  <a:srgbClr val="EEFFFF"/>
+                  <a:srgbClr val="BAC2DE"/>
                 </a:solidFill>
                 <a:latin typeface="Consolas"/>
               </a:rPr>
@@ -6092,7 +6092,7 @@
             <a:r>
               <a:rPr sz="1600">
                 <a:solidFill>
-                  <a:srgbClr val="EEFFFF"/>
+                  <a:srgbClr val="BAC2DE"/>
                 </a:solidFill>
                 <a:latin typeface="Consolas"/>
               </a:rPr>
@@ -6128,7 +6128,7 @@
             <a:r>
               <a:rPr sz="1600">
                 <a:solidFill>
-                  <a:srgbClr val="EEFFFF"/>
+                  <a:srgbClr val="BAC2DE"/>
                 </a:solidFill>
                 <a:latin typeface="Consolas"/>
               </a:rPr>

--- a/docs/example8_walkthrough.pptx
+++ b/docs/example8_walkthrough.pptx
@@ -9,7 +9,7 @@
     <p:sldId id="257" r:id="rId8"/>
     <p:sldId id="258" r:id="rId9"/>
   </p:sldIdLst>
-  <p:sldSz cx="9144000" cy="6858000" type="screen4x3"/>
+  <p:sldSz cx="12192000" cy="6858000" type="screen4x3"/>
   <p:notesSz cx="6858000" cy="9144000"/>
   <p:defaultTextStyle>
     <a:defPPr>
@@ -3099,7 +3099,7 @@
         <p:spPr>
           <a:xfrm>
             <a:off x="0" y="0"/>
-            <a:ext cx="9144000" cy="6858000"/>
+            <a:ext cx="12192000" cy="6858000"/>
           </a:xfrm>
           <a:prstGeom prst="rect">
             <a:avLst/>
@@ -3141,7 +3141,7 @@
         </p:nvSpPr>
         <p:spPr>
           <a:xfrm>
-            <a:off x="7543800" y="0"/>
+            <a:off x="10591800" y="0"/>
             <a:ext cx="1600200" cy="6858000"/>
           </a:xfrm>
           <a:prstGeom prst="rect">
@@ -3186,7 +3186,7 @@
         </p:nvSpPr>
         <p:spPr>
           <a:xfrm rot="16200000">
-            <a:off x="7616952" y="274320"/>
+            <a:off x="10664952" y="274320"/>
             <a:ext cx="1453896" cy="6309360"/>
           </a:xfrm>
           <a:prstGeom prst="rect">
@@ -3223,7 +3223,7 @@
         <p:spPr>
           <a:xfrm>
             <a:off x="731520" y="502920"/>
-            <a:ext cx="6446520" cy="1051560"/>
+            <a:ext cx="9494520" cy="1051560"/>
           </a:xfrm>
           <a:prstGeom prst="rect">
             <a:avLst/>
@@ -3318,8 +3318,8 @@
         </p:blipFill>
         <p:spPr>
           <a:xfrm>
-            <a:off x="274319" y="1691640"/>
-            <a:ext cx="6995160" cy="3899087"/>
+            <a:off x="948628" y="1691640"/>
+            <a:ext cx="8694542" cy="4846320"/>
           </a:xfrm>
           <a:prstGeom prst="rect">
             <a:avLst/>
@@ -3353,7 +3353,7 @@
         <p:spPr>
           <a:xfrm>
             <a:off x="0" y="0"/>
-            <a:ext cx="9144000" cy="6858000"/>
+            <a:ext cx="12192000" cy="6858000"/>
           </a:xfrm>
           <a:prstGeom prst="rect">
             <a:avLst/>
@@ -3396,7 +3396,7 @@
         <p:spPr>
           <a:xfrm>
             <a:off x="164592" y="109728"/>
-            <a:ext cx="8814816" cy="6638544"/>
+            <a:ext cx="11862816" cy="6638544"/>
           </a:xfrm>
           <a:prstGeom prst="rect">
             <a:avLst/>
@@ -5494,7 +5494,7 @@
         <p:spPr>
           <a:xfrm>
             <a:off x="0" y="0"/>
-            <a:ext cx="9144000" cy="6858000"/>
+            <a:ext cx="12192000" cy="6858000"/>
           </a:xfrm>
           <a:prstGeom prst="rect">
             <a:avLst/>
@@ -5537,7 +5537,7 @@
         <p:spPr>
           <a:xfrm>
             <a:off x="164592" y="109728"/>
-            <a:ext cx="8814816" cy="6638544"/>
+            <a:ext cx="11862816" cy="6638544"/>
           </a:xfrm>
           <a:prstGeom prst="rect">
             <a:avLst/>
